--- a/research/cbor-cross-platform-spec@ietf-123.pptx
+++ b/research/cbor-cross-platform-spec@ietf-123.pptx
@@ -7172,8 +7172,8 @@
         </p:nvSpPr>
         <p:spPr>
           <a:xfrm>
-            <a:off x="2451850" y="772597"/>
-            <a:ext cx="4240328" cy="523220"/>
+            <a:off x="1160634" y="509847"/>
+            <a:ext cx="6822765" cy="523220"/>
           </a:xfrm>
           <a:prstGeom prst="rect">
             <a:avLst/>
@@ -7201,7 +7201,27 @@
             </a:r>
             <a:r>
               <a:rPr lang="en-US" sz="2800" noProof="0" dirty="0"/>
-              <a:t> (DE)</a:t>
+              <a:t> (DE) in </a:t>
+            </a:r>
+            <a:r>
+              <a:rPr lang="en-US" sz="2800" noProof="0" dirty="0">
+                <a:latin typeface="Courier New" panose="02070309020205020404" pitchFamily="49" charset="0"/>
+                <a:cs typeface="Courier New" panose="02070309020205020404" pitchFamily="49" charset="0"/>
+              </a:rPr>
+              <a:t>CBOR</a:t>
+            </a:r>
+            <a:r>
+              <a:rPr lang="en-US" sz="2800" noProof="0" dirty="0">
+                <a:cs typeface="Courier New" panose="02070309020205020404" pitchFamily="49" charset="0"/>
+              </a:rPr>
+              <a:t>::</a:t>
+            </a:r>
+            <a:r>
+              <a:rPr lang="en-US" sz="2800" noProof="0" dirty="0">
+                <a:latin typeface="Courier New" panose="02070309020205020404" pitchFamily="49" charset="0"/>
+                <a:cs typeface="Courier New" panose="02070309020205020404" pitchFamily="49" charset="0"/>
+              </a:rPr>
+              <a:t>Core</a:t>
             </a:r>
           </a:p>
         </p:txBody>
@@ -7220,8 +7240,8 @@
         </p:nvSpPr>
         <p:spPr>
           <a:xfrm>
-            <a:off x="915526" y="1545699"/>
-            <a:ext cx="7592320" cy="4539704"/>
+            <a:off x="883995" y="1198864"/>
+            <a:ext cx="7592320" cy="5278368"/>
           </a:xfrm>
           <a:prstGeom prst="rect">
             <a:avLst/>
@@ -7247,7 +7267,7 @@
             </a:r>
             <a:r>
               <a:rPr lang="en-US" sz="2400" i="1" noProof="0" dirty="0"/>
-              <a:t>simpler design</a:t>
+              <a:t>simpler encoder design</a:t>
             </a:r>
             <a:r>
               <a:rPr lang="en-US" sz="2400" noProof="0" dirty="0"/>
@@ -7255,7 +7275,7 @@
             </a:r>
             <a:r>
               <a:rPr lang="en-US" sz="2400" i="1" noProof="0" dirty="0"/>
-              <a:t>free of cost</a:t>
+              <a:t>practically free of cost</a:t>
             </a:r>
             <a:r>
               <a:rPr lang="en-US" sz="2400" noProof="0" dirty="0"/>
@@ -7267,7 +7287,7 @@
             </a:r>
             <a:r>
               <a:rPr lang="en-US" sz="2400" noProof="0" dirty="0"/>
-              <a:t>.</a:t>
+              <a:t>.  As a bonus, duplicate key detection becomes default.</a:t>
             </a:r>
           </a:p>
           <a:p>
@@ -7280,7 +7300,7 @@
             </a:pPr>
             <a:r>
               <a:rPr lang="en-US" sz="2400" noProof="0" dirty="0"/>
-              <a:t>DE relies on </a:t>
+              <a:t>DE primarily relies on </a:t>
             </a:r>
             <a:r>
               <a:rPr lang="en-US" sz="2400" i="1" noProof="0" dirty="0"/>
@@ -7376,7 +7396,7 @@
               <a:rPr lang="en-US" sz="2400" dirty="0">
                 <a:latin typeface="-apple-system"/>
               </a:rPr>
-              <a:t>Application developers hardly ever have to bother with the inner workings of deterministically encoded CBOR.</a:t>
+              <a:t>Application developers should hardly ever have to bother with the inner workings of deterministically encoded CBOR.</a:t>
             </a:r>
           </a:p>
         </p:txBody>

--- a/research/cbor-cross-platform-spec@ietf-123.pptx
+++ b/research/cbor-cross-platform-spec@ietf-123.pptx
@@ -204,7 +204,7 @@
           <a:p>
             <a:fld id="{9D12DC2B-A868-EB48-BC74-89BE29D1DE6E}" type="datetimeFigureOut">
               <a:rPr lang="en-US" smtClean="0"/>
-              <a:t>6/15/25</a:t>
+              <a:t>6/21/25</a:t>
             </a:fld>
             <a:endParaRPr lang="en-US" dirty="0"/>
           </a:p>
@@ -1882,10 +1882,9 @@
           <a:p>
             <a:pPr algn="ctr"/>
             <a:r>
-              <a:rPr lang="en-US" sz="2400" noProof="0"/>
-              <a:t>2025-06-15</a:t>
-            </a:r>
-            <a:endParaRPr lang="en-US" sz="2400" noProof="0" dirty="0"/>
+              <a:rPr lang="en-US" sz="2400" noProof="0" dirty="0"/>
+              <a:t>2025-06-21</a:t>
+            </a:r>
           </a:p>
         </p:txBody>
       </p:sp>
@@ -2250,10 +2249,6 @@
               <a:t>in practice</a:t>
             </a:r>
             <a:r>
-              <a:rPr lang="en-US" sz="2400" baseline="30000" dirty="0"/>
-              <a:t>1</a:t>
-            </a:r>
-            <a:r>
               <a:rPr lang="en-US" sz="2400" noProof="0" dirty="0"/>
               <a:t>] rather use RFC 7493 aka “I-JSON”</a:t>
             </a:r>
@@ -2270,10 +2265,7 @@
               <a:rPr lang="en-US" sz="2400" noProof="0" dirty="0"/>
               <a:t>The JavaScript “JSON” object in browsers is extremely limited</a:t>
             </a:r>
-            <a:r>
-              <a:rPr lang="en-US" sz="2400" baseline="30000" noProof="0" dirty="0"/>
-              <a:t>2</a:t>
-            </a:r>
+            <a:endParaRPr lang="en-US" sz="2400" baseline="30000" noProof="0" dirty="0"/>
           </a:p>
           <a:p>
             <a:pPr marL="251460" indent="-251460">
@@ -2287,10 +2279,7 @@
               <a:rPr lang="en-US" sz="2400" noProof="0" dirty="0"/>
               <a:t>JSON has no “blob” support. Base64 is all over the place</a:t>
             </a:r>
-            <a:r>
-              <a:rPr lang="en-US" sz="2400" baseline="30000" noProof="0" dirty="0"/>
-              <a:t>3</a:t>
-            </a:r>
+            <a:endParaRPr lang="en-US" sz="2400" baseline="30000" noProof="0" dirty="0"/>
           </a:p>
           <a:p>
             <a:pPr marL="251460" indent="-251460">
@@ -2304,10 +2293,7 @@
               <a:rPr lang="en-US" sz="2400" noProof="0" dirty="0"/>
               <a:t>JSON has no deterministic mode.  RFC 8785 is not the same</a:t>
             </a:r>
-            <a:r>
-              <a:rPr lang="en-US" sz="2400" baseline="30000" noProof="0" dirty="0"/>
-              <a:t>4</a:t>
-            </a:r>
+            <a:endParaRPr lang="en-US" sz="2400" baseline="30000" noProof="0" dirty="0"/>
           </a:p>
           <a:p>
             <a:pPr marL="251460" indent="-251460">
@@ -2321,10 +2307,7 @@
               <a:rPr lang="en-US" sz="2400" noProof="0" dirty="0"/>
               <a:t>JSON has no extension mechanism</a:t>
             </a:r>
-            <a:r>
-              <a:rPr lang="en-US" sz="2400" baseline="30000" noProof="0" dirty="0"/>
-              <a:t>5</a:t>
-            </a:r>
+            <a:endParaRPr lang="en-US" sz="2400" baseline="30000" noProof="0" dirty="0"/>
           </a:p>
           <a:p>
             <a:pPr marL="342900" indent="-342900">
@@ -2362,15 +2345,11 @@
             </a:r>
             <a:r>
               <a:rPr lang="en-US" sz="2400" noProof="0" dirty="0"/>
-              <a:t> a powerful alternative, unhampered by the JSON legacy</a:t>
-            </a:r>
-            <a:r>
-              <a:rPr lang="en-US" sz="2400" baseline="30000" noProof="0" dirty="0"/>
-              <a:t>6</a:t>
-            </a:r>
-            <a:r>
-              <a:rPr lang="en-US" sz="2400" noProof="0" dirty="0"/>
-              <a:t>:</a:t>
+              <a:t> a powerful alternative, unhampered </a:t>
+            </a:r>
+            <a:r>
+              <a:rPr lang="en-US" sz="2400" noProof="0"/>
+              <a:t>by JSON legacy:</a:t>
             </a:r>
             <a:br>
               <a:rPr lang="en-US" sz="2400" noProof="0" dirty="0"/>
